--- a/doc/例图.pptx
+++ b/doc/例图.pptx
@@ -5,11 +5,11 @@
     <p:sldMasterId id="2147483648" r:id="rId1"/>
   </p:sldMasterIdLst>
   <p:sldIdLst>
-    <p:sldId id="259" r:id="rId2"/>
-    <p:sldId id="256" r:id="rId3"/>
-    <p:sldId id="257" r:id="rId4"/>
-    <p:sldId id="258" r:id="rId5"/>
-    <p:sldId id="260" r:id="rId6"/>
+    <p:sldId id="256" r:id="rId2"/>
+    <p:sldId id="257" r:id="rId3"/>
+    <p:sldId id="258" r:id="rId4"/>
+    <p:sldId id="260" r:id="rId5"/>
+    <p:sldId id="261" r:id="rId6"/>
   </p:sldIdLst>
   <p:sldSz cx="12192000" cy="6858000"/>
   <p:notesSz cx="6858000" cy="9144000"/>
@@ -263,7 +263,7 @@
           <a:p>
             <a:fld id="{48045B9F-A879-4380-B510-0030A9AB8EB6}" type="datetimeFigureOut">
               <a:rPr lang="zh-CN" altLang="en-US" smtClean="0"/>
-              <a:t>2025/10/26</a:t>
+              <a:t>2026/8/11</a:t>
             </a:fld>
             <a:endParaRPr lang="zh-CN" altLang="en-US"/>
           </a:p>
@@ -461,7 +461,7 @@
           <a:p>
             <a:fld id="{48045B9F-A879-4380-B510-0030A9AB8EB6}" type="datetimeFigureOut">
               <a:rPr lang="zh-CN" altLang="en-US" smtClean="0"/>
-              <a:t>2025/10/26</a:t>
+              <a:t>2026/8/11</a:t>
             </a:fld>
             <a:endParaRPr lang="zh-CN" altLang="en-US"/>
           </a:p>
@@ -669,7 +669,7 @@
           <a:p>
             <a:fld id="{48045B9F-A879-4380-B510-0030A9AB8EB6}" type="datetimeFigureOut">
               <a:rPr lang="zh-CN" altLang="en-US" smtClean="0"/>
-              <a:t>2025/10/26</a:t>
+              <a:t>2026/8/11</a:t>
             </a:fld>
             <a:endParaRPr lang="zh-CN" altLang="en-US"/>
           </a:p>
@@ -867,7 +867,7 @@
           <a:p>
             <a:fld id="{48045B9F-A879-4380-B510-0030A9AB8EB6}" type="datetimeFigureOut">
               <a:rPr lang="zh-CN" altLang="en-US" smtClean="0"/>
-              <a:t>2025/10/26</a:t>
+              <a:t>2026/8/11</a:t>
             </a:fld>
             <a:endParaRPr lang="zh-CN" altLang="en-US"/>
           </a:p>
@@ -1142,7 +1142,7 @@
           <a:p>
             <a:fld id="{48045B9F-A879-4380-B510-0030A9AB8EB6}" type="datetimeFigureOut">
               <a:rPr lang="zh-CN" altLang="en-US" smtClean="0"/>
-              <a:t>2025/10/26</a:t>
+              <a:t>2026/8/11</a:t>
             </a:fld>
             <a:endParaRPr lang="zh-CN" altLang="en-US"/>
           </a:p>
@@ -1407,7 +1407,7 @@
           <a:p>
             <a:fld id="{48045B9F-A879-4380-B510-0030A9AB8EB6}" type="datetimeFigureOut">
               <a:rPr lang="zh-CN" altLang="en-US" smtClean="0"/>
-              <a:t>2025/10/26</a:t>
+              <a:t>2026/8/11</a:t>
             </a:fld>
             <a:endParaRPr lang="zh-CN" altLang="en-US"/>
           </a:p>
@@ -1819,7 +1819,7 @@
           <a:p>
             <a:fld id="{48045B9F-A879-4380-B510-0030A9AB8EB6}" type="datetimeFigureOut">
               <a:rPr lang="zh-CN" altLang="en-US" smtClean="0"/>
-              <a:t>2025/10/26</a:t>
+              <a:t>2026/8/11</a:t>
             </a:fld>
             <a:endParaRPr lang="zh-CN" altLang="en-US"/>
           </a:p>
@@ -1960,7 +1960,7 @@
           <a:p>
             <a:fld id="{48045B9F-A879-4380-B510-0030A9AB8EB6}" type="datetimeFigureOut">
               <a:rPr lang="zh-CN" altLang="en-US" smtClean="0"/>
-              <a:t>2025/10/26</a:t>
+              <a:t>2026/8/11</a:t>
             </a:fld>
             <a:endParaRPr lang="zh-CN" altLang="en-US"/>
           </a:p>
@@ -2073,7 +2073,7 @@
           <a:p>
             <a:fld id="{48045B9F-A879-4380-B510-0030A9AB8EB6}" type="datetimeFigureOut">
               <a:rPr lang="zh-CN" altLang="en-US" smtClean="0"/>
-              <a:t>2025/10/26</a:t>
+              <a:t>2026/8/11</a:t>
             </a:fld>
             <a:endParaRPr lang="zh-CN" altLang="en-US"/>
           </a:p>
@@ -2384,7 +2384,7 @@
           <a:p>
             <a:fld id="{48045B9F-A879-4380-B510-0030A9AB8EB6}" type="datetimeFigureOut">
               <a:rPr lang="zh-CN" altLang="en-US" smtClean="0"/>
-              <a:t>2025/10/26</a:t>
+              <a:t>2026/8/11</a:t>
             </a:fld>
             <a:endParaRPr lang="zh-CN" altLang="en-US"/>
           </a:p>
@@ -2672,7 +2672,7 @@
           <a:p>
             <a:fld id="{48045B9F-A879-4380-B510-0030A9AB8EB6}" type="datetimeFigureOut">
               <a:rPr lang="zh-CN" altLang="en-US" smtClean="0"/>
-              <a:t>2025/10/26</a:t>
+              <a:t>2026/8/11</a:t>
             </a:fld>
             <a:endParaRPr lang="zh-CN" altLang="en-US"/>
           </a:p>
@@ -2913,7 +2913,7 @@
           <a:p>
             <a:fld id="{48045B9F-A879-4380-B510-0030A9AB8EB6}" type="datetimeFigureOut">
               <a:rPr lang="zh-CN" altLang="en-US" smtClean="0"/>
-              <a:t>2025/10/26</a:t>
+              <a:t>2026/8/11</a:t>
             </a:fld>
             <a:endParaRPr lang="zh-CN" altLang="en-US"/>
           </a:p>
@@ -3332,105 +3332,6 @@
       </p:grpSpPr>
       <p:sp>
         <p:nvSpPr>
-          <p:cNvPr id="2" name="矩形 1">
-            <a:extLst>
-              <a:ext uri="{FF2B5EF4-FFF2-40B4-BE49-F238E27FC236}">
-                <a16:creationId xmlns:a16="http://schemas.microsoft.com/office/drawing/2014/main" id="{A3B72484-C30E-4ED4-A8C6-EF3A04D4F793}"/>
-              </a:ext>
-            </a:extLst>
-          </p:cNvPr>
-          <p:cNvSpPr/>
-          <p:nvPr/>
-        </p:nvSpPr>
-        <p:spPr>
-          <a:xfrm>
-            <a:off x="550223" y="609600"/>
-            <a:ext cx="1056904" cy="1250867"/>
-          </a:xfrm>
-          <a:prstGeom prst="rect">
-            <a:avLst/>
-          </a:prstGeom>
-        </p:spPr>
-        <p:style>
-          <a:lnRef idx="2">
-            <a:schemeClr val="accent1">
-              <a:shade val="50000"/>
-            </a:schemeClr>
-          </a:lnRef>
-          <a:fillRef idx="1">
-            <a:schemeClr val="accent1"/>
-          </a:fillRef>
-          <a:effectRef idx="0">
-            <a:schemeClr val="accent1"/>
-          </a:effectRef>
-          <a:fontRef idx="minor">
-            <a:schemeClr val="lt1"/>
-          </a:fontRef>
-        </p:style>
-        <p:txBody>
-          <a:bodyPr rtlCol="0" anchor="ctr"/>
-          <a:lstStyle/>
-          <a:p>
-            <a:pPr algn="ctr"/>
-            <a:r>
-              <a:rPr lang="zh-CN" altLang="en-US" dirty="0"/>
-              <a:t>主界面</a:t>
-            </a:r>
-            <a:endParaRPr lang="en-US" altLang="zh-CN" dirty="0"/>
-          </a:p>
-          <a:p>
-            <a:pPr algn="ctr"/>
-            <a:endParaRPr lang="en-US" altLang="zh-CN" sz="1200" dirty="0"/>
-          </a:p>
-          <a:p>
-            <a:pPr algn="ctr"/>
-            <a:r>
-              <a:rPr lang="zh-CN" altLang="en-US" sz="1200" dirty="0"/>
-              <a:t>开始游戏</a:t>
-            </a:r>
-            <a:endParaRPr lang="en-US" altLang="zh-CN" sz="1200" dirty="0"/>
-          </a:p>
-          <a:p>
-            <a:pPr algn="ctr"/>
-            <a:r>
-              <a:rPr lang="zh-CN" altLang="en-US" sz="1200" dirty="0"/>
-              <a:t>设置</a:t>
-            </a:r>
-          </a:p>
-        </p:txBody>
-      </p:sp>
-    </p:spTree>
-    <p:extLst>
-      <p:ext uri="{BB962C8B-B14F-4D97-AF65-F5344CB8AC3E}">
-        <p14:creationId xmlns:p14="http://schemas.microsoft.com/office/powerpoint/2010/main" val="3260113408"/>
-      </p:ext>
-    </p:extLst>
-  </p:cSld>
-  <p:clrMapOvr>
-    <a:masterClrMapping/>
-  </p:clrMapOvr>
-</p:sld>
-</file>
-
-<file path=ppt/slides/slide2.xml><?xml version="1.0" encoding="utf-8"?>
-<p:sld xmlns:a="http://schemas.openxmlformats.org/drawingml/2006/main" xmlns:r="http://schemas.openxmlformats.org/officeDocument/2006/relationships" xmlns:p="http://schemas.openxmlformats.org/presentationml/2006/main">
-  <p:cSld>
-    <p:spTree>
-      <p:nvGrpSpPr>
-        <p:cNvPr id="1" name=""/>
-        <p:cNvGrpSpPr/>
-        <p:nvPr/>
-      </p:nvGrpSpPr>
-      <p:grpSpPr>
-        <a:xfrm>
-          <a:off x="0" y="0"/>
-          <a:ext cx="0" cy="0"/>
-          <a:chOff x="0" y="0"/>
-          <a:chExt cx="0" cy="0"/>
-        </a:xfrm>
-      </p:grpSpPr>
-      <p:sp>
-        <p:nvSpPr>
           <p:cNvPr id="4" name="矩形: 圆角 3">
             <a:extLst>
               <a:ext uri="{FF2B5EF4-FFF2-40B4-BE49-F238E27FC236}">
@@ -4357,7 +4258,7 @@
 </p:sld>
 </file>
 
-<file path=ppt/slides/slide3.xml><?xml version="1.0" encoding="utf-8"?>
+<file path=ppt/slides/slide2.xml><?xml version="1.0" encoding="utf-8"?>
 <p:sld xmlns:a="http://schemas.openxmlformats.org/drawingml/2006/main" xmlns:r="http://schemas.openxmlformats.org/officeDocument/2006/relationships" xmlns:p="http://schemas.openxmlformats.org/presentationml/2006/main">
   <p:cSld>
     <p:spTree>
@@ -4801,7 +4702,7 @@
 </p:sld>
 </file>
 
-<file path=ppt/slides/slide4.xml><?xml version="1.0" encoding="utf-8"?>
+<file path=ppt/slides/slide3.xml><?xml version="1.0" encoding="utf-8"?>
 <p:sld xmlns:a="http://schemas.openxmlformats.org/drawingml/2006/main" xmlns:r="http://schemas.openxmlformats.org/officeDocument/2006/relationships" xmlns:p="http://schemas.openxmlformats.org/presentationml/2006/main">
   <p:cSld>
     <p:spTree>
@@ -5584,7 +5485,7 @@
 </p:sld>
 </file>
 
-<file path=ppt/slides/slide5.xml><?xml version="1.0" encoding="utf-8"?>
+<file path=ppt/slides/slide4.xml><?xml version="1.0" encoding="utf-8"?>
 <p:sld xmlns:a="http://schemas.openxmlformats.org/drawingml/2006/main" xmlns:r="http://schemas.openxmlformats.org/officeDocument/2006/relationships" xmlns:p="http://schemas.openxmlformats.org/presentationml/2006/main">
   <p:cSld>
     <p:spTree>
@@ -6034,6 +5935,774 @@
     <p:extLst>
       <p:ext uri="{BB962C8B-B14F-4D97-AF65-F5344CB8AC3E}">
         <p14:creationId xmlns:p14="http://schemas.microsoft.com/office/powerpoint/2010/main" val="3418258970"/>
+      </p:ext>
+    </p:extLst>
+  </p:cSld>
+  <p:clrMapOvr>
+    <a:masterClrMapping/>
+  </p:clrMapOvr>
+</p:sld>
+</file>
+
+<file path=ppt/slides/slide5.xml><?xml version="1.0" encoding="utf-8"?>
+<p:sld xmlns:a="http://schemas.openxmlformats.org/drawingml/2006/main" xmlns:r="http://schemas.openxmlformats.org/officeDocument/2006/relationships" xmlns:p="http://schemas.openxmlformats.org/presentationml/2006/main">
+  <p:cSld>
+    <p:spTree>
+      <p:nvGrpSpPr>
+        <p:cNvPr id="1" name="">
+          <a:extLst>
+            <a:ext uri="{FF2B5EF4-FFF2-40B4-BE49-F238E27FC236}">
+              <a16:creationId xmlns:a16="http://schemas.microsoft.com/office/drawing/2014/main" id="{63FC923E-F432-CD31-FE5A-C7E03EDDDCDA}"/>
+            </a:ext>
+          </a:extLst>
+        </p:cNvPr>
+        <p:cNvGrpSpPr/>
+        <p:nvPr/>
+      </p:nvGrpSpPr>
+      <p:grpSpPr>
+        <a:xfrm>
+          <a:off x="0" y="0"/>
+          <a:ext cx="0" cy="0"/>
+          <a:chOff x="0" y="0"/>
+          <a:chExt cx="0" cy="0"/>
+        </a:xfrm>
+      </p:grpSpPr>
+      <p:sp>
+        <p:nvSpPr>
+          <p:cNvPr id="2" name="矩形: 圆角 1">
+            <a:extLst>
+              <a:ext uri="{FF2B5EF4-FFF2-40B4-BE49-F238E27FC236}">
+                <a16:creationId xmlns:a16="http://schemas.microsoft.com/office/drawing/2014/main" id="{4928D282-8938-FA11-E64E-E1784EF55002}"/>
+              </a:ext>
+            </a:extLst>
+          </p:cNvPr>
+          <p:cNvSpPr/>
+          <p:nvPr/>
+        </p:nvSpPr>
+        <p:spPr>
+          <a:xfrm>
+            <a:off x="3830035" y="308805"/>
+            <a:ext cx="2154546" cy="704135"/>
+          </a:xfrm>
+          <a:prstGeom prst="roundRect">
+            <a:avLst/>
+          </a:prstGeom>
+        </p:spPr>
+        <p:style>
+          <a:lnRef idx="2">
+            <a:schemeClr val="accent1">
+              <a:shade val="50000"/>
+            </a:schemeClr>
+          </a:lnRef>
+          <a:fillRef idx="1">
+            <a:schemeClr val="accent1"/>
+          </a:fillRef>
+          <a:effectRef idx="0">
+            <a:schemeClr val="accent1"/>
+          </a:effectRef>
+          <a:fontRef idx="minor">
+            <a:schemeClr val="lt1"/>
+          </a:fontRef>
+        </p:style>
+        <p:txBody>
+          <a:bodyPr rtlCol="0" anchor="ctr"/>
+          <a:lstStyle/>
+          <a:p>
+            <a:pPr algn="ctr"/>
+            <a:r>
+              <a:rPr lang="en-US" altLang="zh-CN" b="1" dirty="0" err="1"/>
+              <a:t>Foundation_movement</a:t>
+            </a:r>
+            <a:endParaRPr lang="zh-CN" altLang="en-US" b="1" dirty="0"/>
+          </a:p>
+        </p:txBody>
+      </p:sp>
+      <p:sp>
+        <p:nvSpPr>
+          <p:cNvPr id="3" name="矩形: 圆角 2">
+            <a:extLst>
+              <a:ext uri="{FF2B5EF4-FFF2-40B4-BE49-F238E27FC236}">
+                <a16:creationId xmlns:a16="http://schemas.microsoft.com/office/drawing/2014/main" id="{7BBE3C04-67CC-D8B6-77CA-51FF5DC230DD}"/>
+              </a:ext>
+            </a:extLst>
+          </p:cNvPr>
+          <p:cNvSpPr/>
+          <p:nvPr/>
+        </p:nvSpPr>
+        <p:spPr>
+          <a:xfrm>
+            <a:off x="3831043" y="1385096"/>
+            <a:ext cx="2153538" cy="704136"/>
+          </a:xfrm>
+          <a:prstGeom prst="roundRect">
+            <a:avLst/>
+          </a:prstGeom>
+        </p:spPr>
+        <p:style>
+          <a:lnRef idx="2">
+            <a:schemeClr val="accent1">
+              <a:shade val="50000"/>
+            </a:schemeClr>
+          </a:lnRef>
+          <a:fillRef idx="1">
+            <a:schemeClr val="accent1"/>
+          </a:fillRef>
+          <a:effectRef idx="0">
+            <a:schemeClr val="accent1"/>
+          </a:effectRef>
+          <a:fontRef idx="minor">
+            <a:schemeClr val="lt1"/>
+          </a:fontRef>
+        </p:style>
+        <p:txBody>
+          <a:bodyPr rtlCol="0" anchor="ctr"/>
+          <a:lstStyle/>
+          <a:p>
+            <a:pPr algn="ctr"/>
+            <a:r>
+              <a:rPr lang="en-US" altLang="zh-CN" b="1" dirty="0" err="1"/>
+              <a:t>Fighter_state_machine_builder</a:t>
+            </a:r>
+            <a:endParaRPr lang="zh-CN" altLang="en-US" b="1" dirty="0"/>
+          </a:p>
+        </p:txBody>
+      </p:sp>
+      <p:cxnSp>
+        <p:nvCxnSpPr>
+          <p:cNvPr id="8" name="直接箭头连接符 7">
+            <a:extLst>
+              <a:ext uri="{FF2B5EF4-FFF2-40B4-BE49-F238E27FC236}">
+                <a16:creationId xmlns:a16="http://schemas.microsoft.com/office/drawing/2014/main" id="{68AB39EE-98BC-C438-5B3E-AB697B17AA7E}"/>
+              </a:ext>
+            </a:extLst>
+          </p:cNvPr>
+          <p:cNvCxnSpPr>
+            <a:cxnSpLocks/>
+          </p:cNvCxnSpPr>
+          <p:nvPr/>
+        </p:nvCxnSpPr>
+        <p:spPr>
+          <a:xfrm>
+            <a:off x="6049042" y="660874"/>
+            <a:ext cx="719586" cy="724222"/>
+          </a:xfrm>
+          <a:prstGeom prst="straightConnector1">
+            <a:avLst/>
+          </a:prstGeom>
+          <a:ln>
+            <a:tailEnd type="triangle"/>
+          </a:ln>
+        </p:spPr>
+        <p:style>
+          <a:lnRef idx="1">
+            <a:schemeClr val="accent1"/>
+          </a:lnRef>
+          <a:fillRef idx="0">
+            <a:schemeClr val="accent1"/>
+          </a:fillRef>
+          <a:effectRef idx="0">
+            <a:schemeClr val="accent1"/>
+          </a:effectRef>
+          <a:fontRef idx="minor">
+            <a:schemeClr val="tx1"/>
+          </a:fontRef>
+        </p:style>
+      </p:cxnSp>
+      <p:sp>
+        <p:nvSpPr>
+          <p:cNvPr id="6" name="矩形: 圆角 5">
+            <a:extLst>
+              <a:ext uri="{FF2B5EF4-FFF2-40B4-BE49-F238E27FC236}">
+                <a16:creationId xmlns:a16="http://schemas.microsoft.com/office/drawing/2014/main" id="{6CC4B421-E5D7-D010-5ED3-B8133BE955F8}"/>
+              </a:ext>
+            </a:extLst>
+          </p:cNvPr>
+          <p:cNvSpPr/>
+          <p:nvPr/>
+        </p:nvSpPr>
+        <p:spPr>
+          <a:xfrm>
+            <a:off x="6937281" y="1385096"/>
+            <a:ext cx="1544782" cy="704135"/>
+          </a:xfrm>
+          <a:prstGeom prst="roundRect">
+            <a:avLst/>
+          </a:prstGeom>
+        </p:spPr>
+        <p:style>
+          <a:lnRef idx="2">
+            <a:schemeClr val="accent1">
+              <a:shade val="50000"/>
+            </a:schemeClr>
+          </a:lnRef>
+          <a:fillRef idx="1">
+            <a:schemeClr val="accent1"/>
+          </a:fillRef>
+          <a:effectRef idx="0">
+            <a:schemeClr val="accent1"/>
+          </a:effectRef>
+          <a:fontRef idx="minor">
+            <a:schemeClr val="lt1"/>
+          </a:fontRef>
+        </p:style>
+        <p:txBody>
+          <a:bodyPr rtlCol="0" anchor="ctr"/>
+          <a:lstStyle/>
+          <a:p>
+            <a:pPr algn="ctr"/>
+            <a:r>
+              <a:rPr lang="en-US" altLang="zh-CN" b="1" dirty="0" err="1"/>
+              <a:t>Foundation_fighter</a:t>
+            </a:r>
+            <a:endParaRPr lang="zh-CN" altLang="en-US" b="1" dirty="0"/>
+          </a:p>
+        </p:txBody>
+      </p:sp>
+      <p:sp>
+        <p:nvSpPr>
+          <p:cNvPr id="7" name="矩形: 圆角 6">
+            <a:extLst>
+              <a:ext uri="{FF2B5EF4-FFF2-40B4-BE49-F238E27FC236}">
+                <a16:creationId xmlns:a16="http://schemas.microsoft.com/office/drawing/2014/main" id="{B192B1DC-742C-C27D-73E4-5C6A5E408954}"/>
+              </a:ext>
+            </a:extLst>
+          </p:cNvPr>
+          <p:cNvSpPr/>
+          <p:nvPr/>
+        </p:nvSpPr>
+        <p:spPr>
+          <a:xfrm>
+            <a:off x="9367000" y="1385096"/>
+            <a:ext cx="1544782" cy="704135"/>
+          </a:xfrm>
+          <a:prstGeom prst="roundRect">
+            <a:avLst/>
+          </a:prstGeom>
+        </p:spPr>
+        <p:style>
+          <a:lnRef idx="2">
+            <a:schemeClr val="accent1">
+              <a:shade val="50000"/>
+            </a:schemeClr>
+          </a:lnRef>
+          <a:fillRef idx="1">
+            <a:schemeClr val="accent1"/>
+          </a:fillRef>
+          <a:effectRef idx="0">
+            <a:schemeClr val="accent1"/>
+          </a:effectRef>
+          <a:fontRef idx="minor">
+            <a:schemeClr val="lt1"/>
+          </a:fontRef>
+        </p:style>
+        <p:txBody>
+          <a:bodyPr rtlCol="0" anchor="ctr"/>
+          <a:lstStyle/>
+          <a:p>
+            <a:pPr algn="ctr"/>
+            <a:r>
+              <a:rPr lang="en-US" altLang="zh-CN" b="1" dirty="0" err="1"/>
+              <a:t>Combat_core_fighter</a:t>
+            </a:r>
+            <a:endParaRPr lang="en-US" altLang="zh-CN" b="1" dirty="0"/>
+          </a:p>
+        </p:txBody>
+      </p:sp>
+      <p:cxnSp>
+        <p:nvCxnSpPr>
+          <p:cNvPr id="9" name="直接箭头连接符 8">
+            <a:extLst>
+              <a:ext uri="{FF2B5EF4-FFF2-40B4-BE49-F238E27FC236}">
+                <a16:creationId xmlns:a16="http://schemas.microsoft.com/office/drawing/2014/main" id="{D9D13A64-7B98-039B-B301-D5373769FBA1}"/>
+              </a:ext>
+            </a:extLst>
+          </p:cNvPr>
+          <p:cNvCxnSpPr>
+            <a:cxnSpLocks/>
+          </p:cNvCxnSpPr>
+          <p:nvPr/>
+        </p:nvCxnSpPr>
+        <p:spPr>
+          <a:xfrm>
+            <a:off x="8575753" y="1737163"/>
+            <a:ext cx="697557" cy="0"/>
+          </a:xfrm>
+          <a:prstGeom prst="straightConnector1">
+            <a:avLst/>
+          </a:prstGeom>
+          <a:ln>
+            <a:tailEnd type="triangle"/>
+          </a:ln>
+        </p:spPr>
+        <p:style>
+          <a:lnRef idx="1">
+            <a:schemeClr val="accent1"/>
+          </a:lnRef>
+          <a:fillRef idx="0">
+            <a:schemeClr val="accent1"/>
+          </a:fillRef>
+          <a:effectRef idx="0">
+            <a:schemeClr val="accent1"/>
+          </a:effectRef>
+          <a:fontRef idx="minor">
+            <a:schemeClr val="tx1"/>
+          </a:fontRef>
+        </p:style>
+      </p:cxnSp>
+      <p:cxnSp>
+        <p:nvCxnSpPr>
+          <p:cNvPr id="11" name="直接箭头连接符 10">
+            <a:extLst>
+              <a:ext uri="{FF2B5EF4-FFF2-40B4-BE49-F238E27FC236}">
+                <a16:creationId xmlns:a16="http://schemas.microsoft.com/office/drawing/2014/main" id="{7268D3C7-8ECE-21AD-C347-927226D70971}"/>
+              </a:ext>
+            </a:extLst>
+          </p:cNvPr>
+          <p:cNvCxnSpPr>
+            <a:cxnSpLocks/>
+          </p:cNvCxnSpPr>
+          <p:nvPr/>
+        </p:nvCxnSpPr>
+        <p:spPr>
+          <a:xfrm>
+            <a:off x="6096000" y="1737163"/>
+            <a:ext cx="672628" cy="0"/>
+          </a:xfrm>
+          <a:prstGeom prst="straightConnector1">
+            <a:avLst/>
+          </a:prstGeom>
+          <a:ln>
+            <a:tailEnd type="triangle"/>
+          </a:ln>
+        </p:spPr>
+        <p:style>
+          <a:lnRef idx="1">
+            <a:schemeClr val="accent1"/>
+          </a:lnRef>
+          <a:fillRef idx="0">
+            <a:schemeClr val="accent1"/>
+          </a:fillRef>
+          <a:effectRef idx="0">
+            <a:schemeClr val="accent1"/>
+          </a:effectRef>
+          <a:fontRef idx="minor">
+            <a:schemeClr val="tx1"/>
+          </a:fontRef>
+        </p:style>
+      </p:cxnSp>
+      <p:sp>
+        <p:nvSpPr>
+          <p:cNvPr id="14" name="矩形: 圆角 13">
+            <a:extLst>
+              <a:ext uri="{FF2B5EF4-FFF2-40B4-BE49-F238E27FC236}">
+                <a16:creationId xmlns:a16="http://schemas.microsoft.com/office/drawing/2014/main" id="{3D76055F-4D2C-1F8F-5DB7-404E599F9C9B}"/>
+              </a:ext>
+            </a:extLst>
+          </p:cNvPr>
+          <p:cNvSpPr/>
+          <p:nvPr/>
+        </p:nvSpPr>
+        <p:spPr>
+          <a:xfrm>
+            <a:off x="844074" y="308805"/>
+            <a:ext cx="2154546" cy="704135"/>
+          </a:xfrm>
+          <a:prstGeom prst="roundRect">
+            <a:avLst/>
+          </a:prstGeom>
+        </p:spPr>
+        <p:style>
+          <a:lnRef idx="2">
+            <a:schemeClr val="accent1">
+              <a:shade val="50000"/>
+            </a:schemeClr>
+          </a:lnRef>
+          <a:fillRef idx="1">
+            <a:schemeClr val="accent1"/>
+          </a:fillRef>
+          <a:effectRef idx="0">
+            <a:schemeClr val="accent1"/>
+          </a:effectRef>
+          <a:fontRef idx="minor">
+            <a:schemeClr val="lt1"/>
+          </a:fontRef>
+        </p:style>
+        <p:txBody>
+          <a:bodyPr rtlCol="0" anchor="ctr"/>
+          <a:lstStyle/>
+          <a:p>
+            <a:pPr algn="ctr"/>
+            <a:r>
+              <a:rPr lang="en-US" altLang="zh-CN" b="1" dirty="0" err="1"/>
+              <a:t>Foundation_fighter_environment</a:t>
+            </a:r>
+            <a:endParaRPr lang="zh-CN" altLang="en-US" b="1" dirty="0"/>
+          </a:p>
+        </p:txBody>
+      </p:sp>
+      <p:cxnSp>
+        <p:nvCxnSpPr>
+          <p:cNvPr id="18" name="直接箭头连接符 17">
+            <a:extLst>
+              <a:ext uri="{FF2B5EF4-FFF2-40B4-BE49-F238E27FC236}">
+                <a16:creationId xmlns:a16="http://schemas.microsoft.com/office/drawing/2014/main" id="{C2B11FC9-6E1D-1B03-872D-936C6F3EAE61}"/>
+              </a:ext>
+            </a:extLst>
+          </p:cNvPr>
+          <p:cNvCxnSpPr>
+            <a:cxnSpLocks/>
+          </p:cNvCxnSpPr>
+          <p:nvPr/>
+        </p:nvCxnSpPr>
+        <p:spPr>
+          <a:xfrm>
+            <a:off x="3044340" y="660874"/>
+            <a:ext cx="697557" cy="0"/>
+          </a:xfrm>
+          <a:prstGeom prst="straightConnector1">
+            <a:avLst/>
+          </a:prstGeom>
+          <a:ln>
+            <a:tailEnd type="triangle"/>
+          </a:ln>
+        </p:spPr>
+        <p:style>
+          <a:lnRef idx="1">
+            <a:schemeClr val="accent1"/>
+          </a:lnRef>
+          <a:fillRef idx="0">
+            <a:schemeClr val="accent1"/>
+          </a:fillRef>
+          <a:effectRef idx="0">
+            <a:schemeClr val="accent1"/>
+          </a:effectRef>
+          <a:fontRef idx="minor">
+            <a:schemeClr val="tx1"/>
+          </a:fontRef>
+        </p:style>
+      </p:cxnSp>
+      <p:sp>
+        <p:nvSpPr>
+          <p:cNvPr id="26" name="矩形: 圆角 25">
+            <a:extLst>
+              <a:ext uri="{FF2B5EF4-FFF2-40B4-BE49-F238E27FC236}">
+                <a16:creationId xmlns:a16="http://schemas.microsoft.com/office/drawing/2014/main" id="{EE7BCCF3-1CC7-3AF8-76A2-CD5F28B63E44}"/>
+              </a:ext>
+            </a:extLst>
+          </p:cNvPr>
+          <p:cNvSpPr/>
+          <p:nvPr/>
+        </p:nvSpPr>
+        <p:spPr>
+          <a:xfrm>
+            <a:off x="3830035" y="2441299"/>
+            <a:ext cx="2154546" cy="704135"/>
+          </a:xfrm>
+          <a:prstGeom prst="roundRect">
+            <a:avLst/>
+          </a:prstGeom>
+        </p:spPr>
+        <p:style>
+          <a:lnRef idx="2">
+            <a:schemeClr val="accent1">
+              <a:shade val="50000"/>
+            </a:schemeClr>
+          </a:lnRef>
+          <a:fillRef idx="1">
+            <a:schemeClr val="accent1"/>
+          </a:fillRef>
+          <a:effectRef idx="0">
+            <a:schemeClr val="accent1"/>
+          </a:effectRef>
+          <a:fontRef idx="minor">
+            <a:schemeClr val="lt1"/>
+          </a:fontRef>
+        </p:style>
+        <p:txBody>
+          <a:bodyPr rtlCol="0" anchor="ctr"/>
+          <a:lstStyle/>
+          <a:p>
+            <a:pPr algn="ctr"/>
+            <a:r>
+              <a:rPr lang="en-US" altLang="zh-CN" b="1" dirty="0" err="1"/>
+              <a:t>Input_set</a:t>
+            </a:r>
+            <a:endParaRPr lang="en-US" altLang="zh-CN" b="1" dirty="0"/>
+          </a:p>
+        </p:txBody>
+      </p:sp>
+      <p:cxnSp>
+        <p:nvCxnSpPr>
+          <p:cNvPr id="27" name="直接箭头连接符 26">
+            <a:extLst>
+              <a:ext uri="{FF2B5EF4-FFF2-40B4-BE49-F238E27FC236}">
+                <a16:creationId xmlns:a16="http://schemas.microsoft.com/office/drawing/2014/main" id="{7309450B-30ED-0FF1-2D90-929AA9A96204}"/>
+              </a:ext>
+            </a:extLst>
+          </p:cNvPr>
+          <p:cNvCxnSpPr>
+            <a:cxnSpLocks/>
+          </p:cNvCxnSpPr>
+          <p:nvPr/>
+        </p:nvCxnSpPr>
+        <p:spPr>
+          <a:xfrm flipV="1">
+            <a:off x="6049042" y="2089231"/>
+            <a:ext cx="719586" cy="704137"/>
+          </a:xfrm>
+          <a:prstGeom prst="straightConnector1">
+            <a:avLst/>
+          </a:prstGeom>
+          <a:ln>
+            <a:tailEnd type="triangle"/>
+          </a:ln>
+        </p:spPr>
+        <p:style>
+          <a:lnRef idx="1">
+            <a:schemeClr val="accent1"/>
+          </a:lnRef>
+          <a:fillRef idx="0">
+            <a:schemeClr val="accent1"/>
+          </a:fillRef>
+          <a:effectRef idx="0">
+            <a:schemeClr val="accent1"/>
+          </a:effectRef>
+          <a:fontRef idx="minor">
+            <a:schemeClr val="tx1"/>
+          </a:fontRef>
+        </p:style>
+      </p:cxnSp>
+      <p:sp>
+        <p:nvSpPr>
+          <p:cNvPr id="30" name="矩形: 圆角 29">
+            <a:extLst>
+              <a:ext uri="{FF2B5EF4-FFF2-40B4-BE49-F238E27FC236}">
+                <a16:creationId xmlns:a16="http://schemas.microsoft.com/office/drawing/2014/main" id="{36861799-DA47-9CAA-2F68-79113E5A3895}"/>
+              </a:ext>
+            </a:extLst>
+          </p:cNvPr>
+          <p:cNvSpPr/>
+          <p:nvPr/>
+        </p:nvSpPr>
+        <p:spPr>
+          <a:xfrm>
+            <a:off x="6937281" y="2441299"/>
+            <a:ext cx="2154546" cy="704135"/>
+          </a:xfrm>
+          <a:prstGeom prst="roundRect">
+            <a:avLst/>
+          </a:prstGeom>
+        </p:spPr>
+        <p:style>
+          <a:lnRef idx="2">
+            <a:schemeClr val="accent1">
+              <a:shade val="50000"/>
+            </a:schemeClr>
+          </a:lnRef>
+          <a:fillRef idx="1">
+            <a:schemeClr val="accent1"/>
+          </a:fillRef>
+          <a:effectRef idx="0">
+            <a:schemeClr val="accent1"/>
+          </a:effectRef>
+          <a:fontRef idx="minor">
+            <a:schemeClr val="lt1"/>
+          </a:fontRef>
+        </p:style>
+        <p:txBody>
+          <a:bodyPr rtlCol="0" anchor="ctr"/>
+          <a:lstStyle/>
+          <a:p>
+            <a:pPr algn="ctr"/>
+            <a:r>
+              <a:rPr lang="en-US" altLang="zh-CN" b="1" dirty="0" err="1"/>
+              <a:t>Combat_rule_set</a:t>
+            </a:r>
+            <a:endParaRPr lang="en-US" altLang="zh-CN" b="1" dirty="0"/>
+          </a:p>
+        </p:txBody>
+      </p:sp>
+      <p:cxnSp>
+        <p:nvCxnSpPr>
+          <p:cNvPr id="31" name="直接箭头连接符 30">
+            <a:extLst>
+              <a:ext uri="{FF2B5EF4-FFF2-40B4-BE49-F238E27FC236}">
+                <a16:creationId xmlns:a16="http://schemas.microsoft.com/office/drawing/2014/main" id="{EA719CC9-0EB0-8637-BFC9-B4C20737049F}"/>
+              </a:ext>
+            </a:extLst>
+          </p:cNvPr>
+          <p:cNvCxnSpPr>
+            <a:cxnSpLocks/>
+          </p:cNvCxnSpPr>
+          <p:nvPr/>
+        </p:nvCxnSpPr>
+        <p:spPr>
+          <a:xfrm flipV="1">
+            <a:off x="9156288" y="2205990"/>
+            <a:ext cx="627792" cy="587378"/>
+          </a:xfrm>
+          <a:prstGeom prst="straightConnector1">
+            <a:avLst/>
+          </a:prstGeom>
+          <a:ln>
+            <a:tailEnd type="triangle"/>
+          </a:ln>
+        </p:spPr>
+        <p:style>
+          <a:lnRef idx="1">
+            <a:schemeClr val="accent1"/>
+          </a:lnRef>
+          <a:fillRef idx="0">
+            <a:schemeClr val="accent1"/>
+          </a:fillRef>
+          <a:effectRef idx="0">
+            <a:schemeClr val="accent1"/>
+          </a:effectRef>
+          <a:fontRef idx="minor">
+            <a:schemeClr val="tx1"/>
+          </a:fontRef>
+        </p:style>
+      </p:cxnSp>
+      <p:sp>
+        <p:nvSpPr>
+          <p:cNvPr id="33" name="文本框 32">
+            <a:extLst>
+              <a:ext uri="{FF2B5EF4-FFF2-40B4-BE49-F238E27FC236}">
+                <a16:creationId xmlns:a16="http://schemas.microsoft.com/office/drawing/2014/main" id="{CE47B288-6F44-C384-7ECB-8955328E626E}"/>
+              </a:ext>
+            </a:extLst>
+          </p:cNvPr>
+          <p:cNvSpPr txBox="1"/>
+          <p:nvPr/>
+        </p:nvSpPr>
+        <p:spPr>
+          <a:xfrm>
+            <a:off x="8302431" y="1434171"/>
+            <a:ext cx="1255862" cy="253916"/>
+          </a:xfrm>
+          <a:prstGeom prst="rect">
+            <a:avLst/>
+          </a:prstGeom>
+          <a:noFill/>
+        </p:spPr>
+        <p:txBody>
+          <a:bodyPr wrap="square" rtlCol="0">
+            <a:spAutoFit/>
+          </a:bodyPr>
+          <a:lstStyle/>
+          <a:p>
+            <a:pPr algn="ctr"/>
+            <a:r>
+              <a:rPr lang="en-US" altLang="zh-CN" sz="1050" dirty="0">
+                <a:solidFill>
+                  <a:srgbClr val="002060"/>
+                </a:solidFill>
+              </a:rPr>
+              <a:t>extend</a:t>
+            </a:r>
+            <a:endParaRPr lang="zh-CN" altLang="en-US" sz="1050" dirty="0">
+              <a:solidFill>
+                <a:srgbClr val="002060"/>
+              </a:solidFill>
+            </a:endParaRPr>
+          </a:p>
+        </p:txBody>
+      </p:sp>
+      <p:cxnSp>
+        <p:nvCxnSpPr>
+          <p:cNvPr id="34" name="直接箭头连接符 33">
+            <a:extLst>
+              <a:ext uri="{FF2B5EF4-FFF2-40B4-BE49-F238E27FC236}">
+                <a16:creationId xmlns:a16="http://schemas.microsoft.com/office/drawing/2014/main" id="{BC9C51ED-4B3F-63D6-C6DA-4D0F732F02F2}"/>
+              </a:ext>
+            </a:extLst>
+          </p:cNvPr>
+          <p:cNvCxnSpPr>
+            <a:cxnSpLocks/>
+          </p:cNvCxnSpPr>
+          <p:nvPr/>
+        </p:nvCxnSpPr>
+        <p:spPr>
+          <a:xfrm>
+            <a:off x="9156288" y="2910127"/>
+            <a:ext cx="627792" cy="678893"/>
+          </a:xfrm>
+          <a:prstGeom prst="straightConnector1">
+            <a:avLst/>
+          </a:prstGeom>
+          <a:ln>
+            <a:tailEnd type="triangle"/>
+          </a:ln>
+        </p:spPr>
+        <p:style>
+          <a:lnRef idx="1">
+            <a:schemeClr val="accent1"/>
+          </a:lnRef>
+          <a:fillRef idx="0">
+            <a:schemeClr val="accent1"/>
+          </a:fillRef>
+          <a:effectRef idx="0">
+            <a:schemeClr val="accent1"/>
+          </a:effectRef>
+          <a:fontRef idx="minor">
+            <a:schemeClr val="tx1"/>
+          </a:fontRef>
+        </p:style>
+      </p:cxnSp>
+      <p:sp>
+        <p:nvSpPr>
+          <p:cNvPr id="38" name="矩形: 圆角 37">
+            <a:extLst>
+              <a:ext uri="{FF2B5EF4-FFF2-40B4-BE49-F238E27FC236}">
+                <a16:creationId xmlns:a16="http://schemas.microsoft.com/office/drawing/2014/main" id="{CED6F024-83EE-6657-F32A-145F3C8CB2C7}"/>
+              </a:ext>
+            </a:extLst>
+          </p:cNvPr>
+          <p:cNvSpPr/>
+          <p:nvPr/>
+        </p:nvSpPr>
+        <p:spPr>
+          <a:xfrm>
+            <a:off x="9367000" y="3705779"/>
+            <a:ext cx="1544782" cy="704135"/>
+          </a:xfrm>
+          <a:prstGeom prst="roundRect">
+            <a:avLst/>
+          </a:prstGeom>
+        </p:spPr>
+        <p:style>
+          <a:lnRef idx="2">
+            <a:schemeClr val="accent1">
+              <a:shade val="50000"/>
+            </a:schemeClr>
+          </a:lnRef>
+          <a:fillRef idx="1">
+            <a:schemeClr val="accent1"/>
+          </a:fillRef>
+          <a:effectRef idx="0">
+            <a:schemeClr val="accent1"/>
+          </a:effectRef>
+          <a:fontRef idx="minor">
+            <a:schemeClr val="lt1"/>
+          </a:fontRef>
+        </p:style>
+        <p:txBody>
+          <a:bodyPr rtlCol="0" anchor="ctr"/>
+          <a:lstStyle/>
+          <a:p>
+            <a:pPr algn="ctr"/>
+            <a:r>
+              <a:rPr lang="en-US" altLang="zh-CN" b="1" dirty="0" err="1"/>
+              <a:t>Combat_core_match</a:t>
+            </a:r>
+            <a:endParaRPr lang="en-US" altLang="zh-CN" b="1" dirty="0"/>
+          </a:p>
+        </p:txBody>
+      </p:sp>
+    </p:spTree>
+    <p:extLst>
+      <p:ext uri="{BB962C8B-B14F-4D97-AF65-F5344CB8AC3E}">
+        <p14:creationId xmlns:p14="http://schemas.microsoft.com/office/powerpoint/2010/main" val="1102112386"/>
       </p:ext>
     </p:extLst>
   </p:cSld>
